--- a/presentations/04-prg32qt/04-prg32qt-lecture.pptx
+++ b/presentations/04-prg32qt/04-prg32qt-lecture.pptx
@@ -138,7 +138,7 @@
   <p:extLst>
     <p:ext uri="{521415D9-36F7-43E2-AB2F-B90AF26B5E84}">
       <p14:sectionLst xmlns:p14="http://schemas.microsoft.com/office/powerpoint/2010/main">
-        <p14:section name="Opening" id="{9a72e033-f084-b0f7-429d-3d1710fe9e0b}">
+        <p14:section name="Opening" id="{f618f435-3019-5c74-932c-0860167530c6}">
           <p14:sldIdLst>
             <p14:sldId id="256"/>
             <p14:sldId id="257"/>
@@ -150,7 +150,7 @@
             <p14:sldId id="263"/>
           </p14:sldIdLst>
         </p14:section>
-        <p14:section name="Portability" id="{37592c69-4951-9a79-8bf5-83d333dedc5a}">
+        <p14:section name="Portability" id="{d4018cb6-d83b-e083-c6e9-b9ed4d1ca7b8}">
           <p14:sldIdLst>
             <p14:sldId id="264"/>
             <p14:sldId id="265"/>
@@ -160,14 +160,14 @@
             <p14:sldId id="269"/>
           </p14:sldIdLst>
         </p14:section>
-        <p14:section name="Performance profiles" id="{2281c66d-033e-019e-f4fb-79e658c24a0d}">
+        <p14:section name="Performance profiles" id="{b6922471-923d-0433-9288-03c0f046705d}">
           <p14:sldIdLst>
             <p14:sldId id="270"/>
             <p14:sldId id="271"/>
             <p14:sldId id="272"/>
           </p14:sldIdLst>
         </p14:section>
-        <p14:section name="The debugger" id="{50afc657-a1f9-cf29-6309-790b307cb5d6}">
+        <p14:section name="The debugger" id="{d7759fda-52bf-1a24-0775-5375a0ad750c}">
           <p14:sldIdLst>
             <p14:sldId id="273"/>
             <p14:sldId id="274"/>
@@ -180,7 +180,7 @@
             <p14:sldId id="281"/>
           </p14:sldIdLst>
         </p14:section>
-        <p14:section name="Automation and choice" id="{bef51d9d-fb3c-708f-81e6-bc7953c0577f}">
+        <p14:section name="Automation and choice" id="{d3b01cdc-e2cd-544c-1450-88d2386a33c3}">
           <p14:sldIdLst>
             <p14:sldId id="282"/>
             <p14:sldId id="283"/>
@@ -189,7 +189,7 @@
             <p14:sldId id="286"/>
           </p14:sldIdLst>
         </p14:section>
-        <p14:section name="Closing" id="{670e7353-75dc-f5c8-b0d7-f9fd8ef0e87a}">
+        <p14:section name="Closing" id="{8cc160a3-1796-f2fe-fcf1-d37b44acb477}">
           <p14:sldIdLst>
             <p14:sldId id="287"/>
           </p14:sldIdLst>
